--- a/index/designs/y8-l8/l4-duration-zhengzai/l4-duration-zhengzai.pptx
+++ b/index/designs/y8-l8/l4-duration-zhengzai/l4-duration-zhengzai.pptx
@@ -2235,9 +2235,6 @@
               </a:rPr>
               <a:t>L4 · DURATION Q&amp;A + 正在</a:t>
             </a:r>
-            <a:pPr algn="l" indent="0" marL="0">
-              <a:buNone/>
-            </a:pPr>
             <a:r>
               <a:rPr lang="en-US" sz="900" b="1" dirty="0">
                 <a:solidFill>
@@ -2249,9 +2246,6 @@
               </a:rPr>
               <a:t> |</a:t>
             </a:r>
-            <a:pPr algn="l" indent="0" marL="0">
-              <a:buNone/>
-            </a:pPr>
             <a:r>
               <a:rPr lang="en-US" sz="900" dirty="0">
                 <a:solidFill>
@@ -2640,12 +2634,6 @@
               </a:rPr>
               <a:t>1. In pairs, write a </a:t>
             </a:r>
-            <a:pPr algn="l" indent="0" marL="0">
-              <a:lnSpc>
-                <a:spcPts val="1540"/>
-              </a:lnSpc>
-              <a:buNone/>
-            </a:pPr>
             <a:r>
               <a:rPr lang="en-US" sz="1100" b="1" dirty="0">
                 <a:solidFill>
@@ -2657,12 +2645,6 @@
               </a:rPr>
               <a:t>3–4 exchange dialogue</a:t>
             </a:r>
-            <a:pPr algn="l" indent="0" marL="0">
-              <a:lnSpc>
-                <a:spcPts val="1540"/>
-              </a:lnSpc>
-              <a:buNone/>
-            </a:pPr>
             <a:r>
               <a:rPr lang="en-US" sz="1100" dirty="0">
                 <a:solidFill>
@@ -2674,12 +2656,6 @@
               </a:rPr>
               <a:t> asking and answering about sport duration for </a:t>
             </a:r>
-            <a:pPr algn="l" indent="0" marL="0">
-              <a:lnSpc>
-                <a:spcPts val="1540"/>
-              </a:lnSpc>
-              <a:buNone/>
-            </a:pPr>
             <a:r>
               <a:rPr lang="en-US" sz="1100" b="1" dirty="0">
                 <a:solidFill>
@@ -2712,12 +2688,6 @@
               </a:rPr>
               <a:t>2. Swap papers</a:t>
             </a:r>
-            <a:pPr algn="l" indent="0" marL="0">
-              <a:lnSpc>
-                <a:spcPts val="1540"/>
-              </a:lnSpc>
-              <a:buNone/>
-            </a:pPr>
             <a:r>
               <a:rPr lang="en-US" sz="1100" dirty="0">
                 <a:solidFill>
@@ -2750,12 +2720,6 @@
               </a:rPr>
               <a:t>3. Read your dialogue aloud</a:t>
             </a:r>
-            <a:pPr algn="l" indent="0" marL="0">
-              <a:lnSpc>
-                <a:spcPts val="1540"/>
-              </a:lnSpc>
-              <a:buNone/>
-            </a:pPr>
             <a:r>
               <a:rPr lang="en-US" sz="1100" dirty="0">
                 <a:solidFill>
@@ -2880,9 +2844,6 @@
               </a:rPr>
               <a:t>A</a:t>
             </a:r>
-            <a:pPr algn="l" indent="0" marL="0">
-              <a:buNone/>
-            </a:pPr>
             <a:r>
               <a:rPr lang="en-US" sz="1200" dirty="0">
                 <a:solidFill>
@@ -2894,9 +2855,6 @@
               </a:rPr>
               <a:t> </a:t>
             </a:r>
-            <a:pPr algn="l" indent="0" marL="0">
-              <a:buNone/>
-            </a:pPr>
             <a:r>
               <a:rPr lang="en-US" sz="1400" b="1" dirty="0">
                 <a:solidFill>
@@ -2925,9 +2883,6 @@
               </a:rPr>
               <a:t>B</a:t>
             </a:r>
-            <a:pPr algn="l" indent="0" marL="0">
-              <a:buNone/>
-            </a:pPr>
             <a:r>
               <a:rPr lang="en-US" sz="1200" dirty="0">
                 <a:solidFill>
@@ -2939,9 +2894,6 @@
               </a:rPr>
               <a:t> </a:t>
             </a:r>
-            <a:pPr algn="l" indent="0" marL="0">
-              <a:buNone/>
-            </a:pPr>
             <a:r>
               <a:rPr lang="en-US" sz="1400" b="1" dirty="0">
                 <a:solidFill>
@@ -2970,9 +2922,6 @@
               </a:rPr>
               <a:t>A</a:t>
             </a:r>
-            <a:pPr algn="l" indent="0" marL="0">
-              <a:buNone/>
-            </a:pPr>
             <a:r>
               <a:rPr lang="en-US" sz="1200" dirty="0">
                 <a:solidFill>
@@ -2984,9 +2933,6 @@
               </a:rPr>
               <a:t> </a:t>
             </a:r>
-            <a:pPr algn="l" indent="0" marL="0">
-              <a:buNone/>
-            </a:pPr>
             <a:r>
               <a:rPr lang="en-US" sz="1400" b="1" dirty="0">
                 <a:solidFill>
@@ -3015,9 +2961,6 @@
               </a:rPr>
               <a:t>B</a:t>
             </a:r>
-            <a:pPr algn="l" indent="0" marL="0">
-              <a:buNone/>
-            </a:pPr>
             <a:r>
               <a:rPr lang="en-US" sz="1200" dirty="0">
                 <a:solidFill>
@@ -3029,9 +2972,6 @@
               </a:rPr>
               <a:t> </a:t>
             </a:r>
-            <a:pPr algn="l" indent="0" marL="0">
-              <a:buNone/>
-            </a:pPr>
             <a:r>
               <a:rPr lang="en-US" sz="1400" b="1" dirty="0">
                 <a:solidFill>
@@ -3552,9 +3492,6 @@
               </a:rPr>
               <a:t>L4 · DURATION Q&amp;A + 正在</a:t>
             </a:r>
-            <a:pPr algn="l" indent="0" marL="0">
-              <a:buNone/>
-            </a:pPr>
             <a:r>
               <a:rPr lang="en-US" sz="900" b="1" dirty="0">
                 <a:solidFill>
@@ -3566,9 +3503,6 @@
               </a:rPr>
               <a:t> |</a:t>
             </a:r>
-            <a:pPr algn="l" indent="0" marL="0">
-              <a:buNone/>
-            </a:pPr>
             <a:r>
               <a:rPr lang="en-US" sz="900" dirty="0">
                 <a:solidFill>
@@ -3911,9 +3845,6 @@
               </a:rPr>
               <a:t>💡 Order: </a:t>
             </a:r>
-            <a:pPr algn="l" indent="0" marL="0">
-              <a:buNone/>
-            </a:pPr>
             <a:r>
               <a:rPr lang="en-US" sz="900" b="1" dirty="0">
                 <a:solidFill>
@@ -3925,9 +3856,6 @@
               </a:rPr>
               <a:t>Subject</a:t>
             </a:r>
-            <a:pPr algn="l" indent="0" marL="0">
-              <a:buNone/>
-            </a:pPr>
             <a:r>
               <a:rPr lang="en-US" sz="900" dirty="0">
                 <a:solidFill>
@@ -3939,9 +3867,6 @@
               </a:rPr>
               <a:t> → </a:t>
             </a:r>
-            <a:pPr algn="l" indent="0" marL="0">
-              <a:buNone/>
-            </a:pPr>
             <a:r>
               <a:rPr lang="en-US" sz="900" b="1" dirty="0">
                 <a:solidFill>
@@ -3953,9 +3878,6 @@
               </a:rPr>
               <a:t>每天/每个星期</a:t>
             </a:r>
-            <a:pPr algn="l" indent="0" marL="0">
-              <a:buNone/>
-            </a:pPr>
             <a:r>
               <a:rPr lang="en-US" sz="900" dirty="0">
                 <a:solidFill>
@@ -7368,9 +7290,6 @@
               </a:rPr>
               <a:t>L4 · DURATION Q&amp;A + 正在</a:t>
             </a:r>
-            <a:pPr algn="l" indent="0" marL="0">
-              <a:buNone/>
-            </a:pPr>
             <a:r>
               <a:rPr lang="en-US" sz="900" b="1" dirty="0">
                 <a:solidFill>
@@ -7382,9 +7301,6 @@
               </a:rPr>
               <a:t> |</a:t>
             </a:r>
-            <a:pPr algn="l" indent="0" marL="0">
-              <a:buNone/>
-            </a:pPr>
             <a:r>
               <a:rPr lang="en-US" sz="900" dirty="0">
                 <a:solidFill>
@@ -7897,12 +7813,6 @@
               </a:rPr>
               <a:t>Reuse today's pattern: </a:t>
             </a:r>
-            <a:pPr algn="l" indent="0" marL="0">
-              <a:lnSpc>
-                <a:spcPts val="1500"/>
-              </a:lnSpc>
-              <a:buNone/>
-            </a:pPr>
             <a:r>
               <a:rPr lang="en-US" sz="1000" b="1" dirty="0">
                 <a:solidFill>
@@ -7914,12 +7824,6 @@
               </a:rPr>
               <a:t>你每个星期……几个小时……？</a:t>
             </a:r>
-            <a:pPr algn="l" indent="0" marL="0">
-              <a:lnSpc>
-                <a:spcPts val="1500"/>
-              </a:lnSpc>
-              <a:buNone/>
-            </a:pPr>
             <a:r>
               <a:rPr lang="en-US" sz="1000" dirty="0">
                 <a:solidFill>
@@ -7932,12 +7836,6 @@
               <a:t>
 </a:t>
             </a:r>
-            <a:pPr algn="l" indent="0" marL="0">
-              <a:lnSpc>
-                <a:spcPts val="1500"/>
-              </a:lnSpc>
-              <a:buNone/>
-            </a:pPr>
             <a:r>
               <a:rPr lang="en-US" sz="1000" b="1" dirty="0">
                 <a:solidFill>
@@ -7949,12 +7847,6 @@
               </a:rPr>
               <a:t>Underline any word you're unsure about</a:t>
             </a:r>
-            <a:pPr algn="l" indent="0" marL="0">
-              <a:lnSpc>
-                <a:spcPts val="1500"/>
-              </a:lnSpc>
-              <a:buNone/>
-            </a:pPr>
             <a:r>
               <a:rPr lang="en-US" sz="1000" dirty="0">
                 <a:solidFill>
@@ -8136,9 +8028,6 @@
               </a:rPr>
               <a:t>L4 · DURATION Q&amp;A + 正在</a:t>
             </a:r>
-            <a:pPr algn="l" indent="0" marL="0">
-              <a:buNone/>
-            </a:pPr>
             <a:r>
               <a:rPr lang="en-US" sz="900" b="1" dirty="0">
                 <a:solidFill>
@@ -8150,9 +8039,6 @@
               </a:rPr>
               <a:t> |</a:t>
             </a:r>
-            <a:pPr algn="l" indent="0" marL="0">
-              <a:buNone/>
-            </a:pPr>
             <a:r>
               <a:rPr lang="en-US" sz="900" dirty="0">
                 <a:solidFill>
@@ -9080,9 +8966,6 @@
               </a:rPr>
               <a:t>L4 · DURATION Q&amp;A + 正在</a:t>
             </a:r>
-            <a:pPr algn="l" indent="0" marL="0">
-              <a:buNone/>
-            </a:pPr>
             <a:r>
               <a:rPr lang="en-US" sz="900" b="1" dirty="0">
                 <a:solidFill>
@@ -9094,9 +8977,6 @@
               </a:rPr>
               <a:t> |</a:t>
             </a:r>
-            <a:pPr algn="l" indent="0" marL="0">
-              <a:buNone/>
-            </a:pPr>
             <a:r>
               <a:rPr lang="en-US" sz="900" dirty="0">
                 <a:solidFill>
@@ -9914,12 +9794,6 @@
               </a:rPr>
               <a:t>"Yesterday you could </a:t>
             </a:r>
-            <a:pPr algn="l" indent="0" marL="0">
-              <a:lnSpc>
-                <a:spcPts val="1680"/>
-              </a:lnSpc>
-              <a:buNone/>
-            </a:pPr>
             <a:r>
               <a:rPr lang="en-US" sz="1200" b="1" dirty="0">
                 <a:solidFill>
@@ -9931,12 +9805,6 @@
               </a:rPr>
               <a:t>make</a:t>
             </a:r>
-            <a:pPr algn="l" indent="0" marL="0">
-              <a:lnSpc>
-                <a:spcPts val="1680"/>
-              </a:lnSpc>
-              <a:buNone/>
-            </a:pPr>
             <a:r>
               <a:rPr lang="en-US" sz="1200" dirty="0">
                 <a:solidFill>
@@ -9948,12 +9816,6 @@
               </a:rPr>
               <a:t> a duration statement. Today you'll learn to </a:t>
             </a:r>
-            <a:pPr algn="l" indent="0" marL="0">
-              <a:lnSpc>
-                <a:spcPts val="1680"/>
-              </a:lnSpc>
-              <a:buNone/>
-            </a:pPr>
             <a:r>
               <a:rPr lang="en-US" sz="1200" b="1" dirty="0">
                 <a:solidFill>
@@ -9965,12 +9827,6 @@
               </a:rPr>
               <a:t>ask</a:t>
             </a:r>
-            <a:pPr algn="l" indent="0" marL="0">
-              <a:lnSpc>
-                <a:spcPts val="1680"/>
-              </a:lnSpc>
-              <a:buNone/>
-            </a:pPr>
             <a:r>
               <a:rPr lang="en-US" sz="1200" dirty="0">
                 <a:solidFill>
@@ -10152,9 +10008,6 @@
               </a:rPr>
               <a:t>L4 · DURATION Q&amp;A + 正在</a:t>
             </a:r>
-            <a:pPr algn="l" indent="0" marL="0">
-              <a:buNone/>
-            </a:pPr>
             <a:r>
               <a:rPr lang="en-US" sz="900" b="1" dirty="0">
                 <a:solidFill>
@@ -10166,9 +10019,6 @@
               </a:rPr>
               <a:t> |</a:t>
             </a:r>
-            <a:pPr algn="l" indent="0" marL="0">
-              <a:buNone/>
-            </a:pPr>
             <a:r>
               <a:rPr lang="en-US" sz="900" dirty="0">
                 <a:solidFill>
@@ -10398,15 +10248,6 @@
               </a:rPr>
               <a:t>We are learning to </a:t>
             </a:r>
-            <a:pPr algn="l" indent="0" marL="0">
-              <a:lnSpc>
-                <a:spcPts val="1820"/>
-              </a:lnSpc>
-              <a:spcBef>
-                <a:spcPts val="400"/>
-              </a:spcBef>
-              <a:buNone/>
-            </a:pPr>
             <a:r>
               <a:rPr lang="en-US" sz="1300" b="1" dirty="0">
                 <a:solidFill>
@@ -10418,15 +10259,6 @@
               </a:rPr>
               <a:t>ask and answer how long someone does a sport</a:t>
             </a:r>
-            <a:pPr algn="l" indent="0" marL="0">
-              <a:lnSpc>
-                <a:spcPts val="1820"/>
-              </a:lnSpc>
-              <a:spcBef>
-                <a:spcPts val="400"/>
-              </a:spcBef>
-              <a:buNone/>
-            </a:pPr>
             <a:r>
               <a:rPr lang="en-US" sz="1300" dirty="0">
                 <a:solidFill>
@@ -10519,6 +10351,103 @@
               </a:rPr>
               <a:t>I can ask </a:t>
             </a:r>
+            <a:r>
+              <a:rPr lang="en-US" sz="1200" b="1" dirty="0">
+                <a:solidFill>
+                  <a:srgbClr val="C8943E"/>
+                </a:solidFill>
+                <a:latin typeface="Noto Sans SC" pitchFamily="34" charset="0"/>
+                <a:ea typeface="Noto Sans SC" pitchFamily="34" charset="-122"/>
+                <a:cs typeface="Noto Sans SC" pitchFamily="34" charset="-120"/>
+              </a:rPr>
+              <a:t>你每天/每个星期打几个小时 + sport？</a:t>
+            </a:r>
+            <a:r>
+              <a:rPr lang="en-US" sz="1200" dirty="0">
+                <a:solidFill>
+                  <a:srgbClr val="5B6677"/>
+                </a:solidFill>
+                <a:latin typeface="Noto Sans SC" pitchFamily="34" charset="0"/>
+                <a:ea typeface="Noto Sans SC" pitchFamily="34" charset="-122"/>
+                <a:cs typeface="Noto Sans SC" pitchFamily="34" charset="-120"/>
+              </a:rPr>
+              <a:t> and answer with </a:t>
+            </a:r>
+            <a:r>
+              <a:rPr lang="en-US" sz="1200" b="1" dirty="0">
+                <a:solidFill>
+                  <a:srgbClr val="1E2A38"/>
+                </a:solidFill>
+                <a:latin typeface="Noto Sans SC" pitchFamily="34" charset="0"/>
+                <a:ea typeface="Noto Sans SC" pitchFamily="34" charset="-122"/>
+                <a:cs typeface="Noto Sans SC" pitchFamily="34" charset="-120"/>
+              </a:rPr>
+              <a:t>a duration</a:t>
+            </a:r>
+            <a:endParaRPr lang="en-US" sz="1200" dirty="0"/>
+          </a:p>
+        </p:txBody>
+      </p:sp>
+      <p:sp>
+        <p:nvSpPr>
+          <p:cNvPr id="13" name="Text 11"/>
+          <p:cNvSpPr/>
+          <p:nvPr/>
+        </p:nvSpPr>
+        <p:spPr>
+          <a:xfrm>
+            <a:off x="431750" y="2301329"/>
+            <a:ext cx="207213" cy="200025"/>
+          </a:xfrm>
+          <a:prstGeom prst="rect">
+            <a:avLst/>
+          </a:prstGeom>
+          <a:noFill/>
+          <a:ln/>
+        </p:spPr>
+        <p:txBody>
+          <a:bodyPr wrap="square" lIns="0" tIns="0" rIns="0" bIns="0" rtlCol="0" anchor="t"/>
+          <a:lstStyle/>
+          <a:p>
+            <a:pPr algn="l" indent="0" marL="0">
+              <a:buNone/>
+            </a:pPr>
+            <a:r>
+              <a:rPr lang="en-US" sz="1100" b="1" dirty="0">
+                <a:solidFill>
+                  <a:srgbClr val="C8943E"/>
+                </a:solidFill>
+                <a:latin typeface="Noto Sans SC" pitchFamily="34" charset="0"/>
+                <a:ea typeface="Noto Sans SC" pitchFamily="34" charset="-122"/>
+                <a:cs typeface="Noto Sans SC" pitchFamily="34" charset="-120"/>
+              </a:rPr>
+              <a:t>2</a:t>
+            </a:r>
+            <a:endParaRPr lang="en-US" sz="1100" dirty="0"/>
+          </a:p>
+        </p:txBody>
+      </p:sp>
+      <p:sp>
+        <p:nvSpPr>
+          <p:cNvPr id="14" name="Text 12"/>
+          <p:cNvSpPr/>
+          <p:nvPr/>
+        </p:nvSpPr>
+        <p:spPr>
+          <a:xfrm>
+            <a:off x="761851" y="2301329"/>
+            <a:ext cx="6062472" cy="213271"/>
+          </a:xfrm>
+          <a:prstGeom prst="rect">
+            <a:avLst/>
+          </a:prstGeom>
+          <a:noFill/>
+          <a:ln/>
+        </p:spPr>
+        <p:txBody>
+          <a:bodyPr wrap="square" lIns="0" tIns="0" rIns="0" bIns="0" rtlCol="0" anchor="t"/>
+          <a:lstStyle/>
+          <a:p>
             <a:pPr algn="l" indent="0" marL="0">
               <a:lnSpc>
                 <a:spcPts val="1680"/>
@@ -10526,16 +10455,102 @@
               <a:buNone/>
             </a:pPr>
             <a:r>
+              <a:rPr lang="en-US" sz="1200" dirty="0">
+                <a:solidFill>
+                  <a:srgbClr val="5B6677"/>
+                </a:solidFill>
+                <a:latin typeface="Noto Sans SC" pitchFamily="34" charset="0"/>
+                <a:ea typeface="Noto Sans SC" pitchFamily="34" charset="-122"/>
+                <a:cs typeface="Noto Sans SC" pitchFamily="34" charset="-120"/>
+              </a:rPr>
+              <a:t>I can write a </a:t>
+            </a:r>
+            <a:r>
               <a:rPr lang="en-US" sz="1200" b="1" dirty="0">
                 <a:solidFill>
+                  <a:srgbClr val="1E2A38"/>
+                </a:solidFill>
+                <a:latin typeface="Noto Sans SC" pitchFamily="34" charset="0"/>
+                <a:ea typeface="Noto Sans SC" pitchFamily="34" charset="-122"/>
+                <a:cs typeface="Noto Sans SC" pitchFamily="34" charset="-120"/>
+              </a:rPr>
+              <a:t>full verb + duration + object</a:t>
+            </a:r>
+            <a:r>
+              <a:rPr lang="en-US" sz="1200" dirty="0">
+                <a:solidFill>
+                  <a:srgbClr val="5B6677"/>
+                </a:solidFill>
+                <a:latin typeface="Noto Sans SC" pitchFamily="34" charset="0"/>
+                <a:ea typeface="Noto Sans SC" pitchFamily="34" charset="-122"/>
+                <a:cs typeface="Noto Sans SC" pitchFamily="34" charset="-120"/>
+              </a:rPr>
+              <a:t> sentence for any sport learned so far</a:t>
+            </a:r>
+            <a:endParaRPr lang="en-US" sz="1200" dirty="0"/>
+          </a:p>
+        </p:txBody>
+      </p:sp>
+      <p:sp>
+        <p:nvSpPr>
+          <p:cNvPr id="15" name="Text 13"/>
+          <p:cNvSpPr/>
+          <p:nvPr/>
+        </p:nvSpPr>
+        <p:spPr>
+          <a:xfrm>
+            <a:off x="431750" y="2616101"/>
+            <a:ext cx="207213" cy="200025"/>
+          </a:xfrm>
+          <a:prstGeom prst="rect">
+            <a:avLst/>
+          </a:prstGeom>
+          <a:noFill/>
+          <a:ln/>
+        </p:spPr>
+        <p:txBody>
+          <a:bodyPr wrap="square" lIns="0" tIns="0" rIns="0" bIns="0" rtlCol="0" anchor="t"/>
+          <a:lstStyle/>
+          <a:p>
+            <a:pPr algn="l" indent="0" marL="0">
+              <a:buNone/>
+            </a:pPr>
+            <a:r>
+              <a:rPr lang="en-US" sz="1100" b="1" dirty="0">
+                <a:solidFill>
                   <a:srgbClr val="C8943E"/>
                 </a:solidFill>
                 <a:latin typeface="Noto Sans SC" pitchFamily="34" charset="0"/>
                 <a:ea typeface="Noto Sans SC" pitchFamily="34" charset="-122"/>
                 <a:cs typeface="Noto Sans SC" pitchFamily="34" charset="-120"/>
               </a:rPr>
-              <a:t>你每天/每个星期打几个小时 + sport？</a:t>
-            </a:r>
+              <a:t>3</a:t>
+            </a:r>
+            <a:endParaRPr lang="en-US" sz="1100" dirty="0"/>
+          </a:p>
+        </p:txBody>
+      </p:sp>
+      <p:sp>
+        <p:nvSpPr>
+          <p:cNvPr id="16" name="Text 14"/>
+          <p:cNvSpPr/>
+          <p:nvPr/>
+        </p:nvSpPr>
+        <p:spPr>
+          <a:xfrm>
+            <a:off x="761851" y="2616101"/>
+            <a:ext cx="5079992" cy="213271"/>
+          </a:xfrm>
+          <a:prstGeom prst="rect">
+            <a:avLst/>
+          </a:prstGeom>
+          <a:noFill/>
+          <a:ln/>
+        </p:spPr>
+        <p:txBody>
+          <a:bodyPr wrap="square" lIns="0" tIns="0" rIns="0" bIns="0" rtlCol="0" anchor="t"/>
+          <a:lstStyle/>
+          <a:p>
             <a:pPr algn="l" indent="0" marL="0">
               <a:lnSpc>
                 <a:spcPts val="1680"/>
@@ -10551,95 +10566,19 @@
                 <a:ea typeface="Noto Sans SC" pitchFamily="34" charset="-122"/>
                 <a:cs typeface="Noto Sans SC" pitchFamily="34" charset="-120"/>
               </a:rPr>
-              <a:t> and answer with </a:t>
-            </a:r>
-            <a:pPr algn="l" indent="0" marL="0">
-              <a:lnSpc>
-                <a:spcPts val="1680"/>
-              </a:lnSpc>
-              <a:buNone/>
-            </a:pPr>
+              <a:t>I can describe what someone is doing using </a:t>
+            </a:r>
             <a:r>
               <a:rPr lang="en-US" sz="1200" b="1" dirty="0">
                 <a:solidFill>
-                  <a:srgbClr val="1E2A38"/>
-                </a:solidFill>
-                <a:latin typeface="Noto Sans SC" pitchFamily="34" charset="0"/>
-                <a:ea typeface="Noto Sans SC" pitchFamily="34" charset="-122"/>
-                <a:cs typeface="Noto Sans SC" pitchFamily="34" charset="-120"/>
-              </a:rPr>
-              <a:t>a duration</a:t>
-            </a:r>
-            <a:endParaRPr lang="en-US" sz="1200" dirty="0"/>
-          </a:p>
-        </p:txBody>
-      </p:sp>
-      <p:sp>
-        <p:nvSpPr>
-          <p:cNvPr id="13" name="Text 11"/>
-          <p:cNvSpPr/>
-          <p:nvPr/>
-        </p:nvSpPr>
-        <p:spPr>
-          <a:xfrm>
-            <a:off x="431750" y="2301329"/>
-            <a:ext cx="207213" cy="200025"/>
-          </a:xfrm>
-          <a:prstGeom prst="rect">
-            <a:avLst/>
-          </a:prstGeom>
-          <a:noFill/>
-          <a:ln/>
-        </p:spPr>
-        <p:txBody>
-          <a:bodyPr wrap="square" lIns="0" tIns="0" rIns="0" bIns="0" rtlCol="0" anchor="t"/>
-          <a:lstStyle/>
-          <a:p>
-            <a:pPr algn="l" indent="0" marL="0">
-              <a:buNone/>
-            </a:pPr>
-            <a:r>
-              <a:rPr lang="en-US" sz="1100" b="1" dirty="0">
-                <a:solidFill>
                   <a:srgbClr val="C8943E"/>
                 </a:solidFill>
                 <a:latin typeface="Noto Sans SC" pitchFamily="34" charset="0"/>
                 <a:ea typeface="Noto Sans SC" pitchFamily="34" charset="-122"/>
                 <a:cs typeface="Noto Sans SC" pitchFamily="34" charset="-120"/>
               </a:rPr>
-              <a:t>2</a:t>
-            </a:r>
-            <a:endParaRPr lang="en-US" sz="1100" dirty="0"/>
-          </a:p>
-        </p:txBody>
-      </p:sp>
-      <p:sp>
-        <p:nvSpPr>
-          <p:cNvPr id="14" name="Text 12"/>
-          <p:cNvSpPr/>
-          <p:nvPr/>
-        </p:nvSpPr>
-        <p:spPr>
-          <a:xfrm>
-            <a:off x="761851" y="2301329"/>
-            <a:ext cx="6062472" cy="213271"/>
-          </a:xfrm>
-          <a:prstGeom prst="rect">
-            <a:avLst/>
-          </a:prstGeom>
-          <a:noFill/>
-          <a:ln/>
-        </p:spPr>
-        <p:txBody>
-          <a:bodyPr wrap="square" lIns="0" tIns="0" rIns="0" bIns="0" rtlCol="0" anchor="t"/>
-          <a:lstStyle/>
-          <a:p>
-            <a:pPr algn="l" indent="0" marL="0">
-              <a:lnSpc>
-                <a:spcPts val="1680"/>
-              </a:lnSpc>
-              <a:buNone/>
-            </a:pPr>
+              <a:t>正在</a:t>
+            </a:r>
             <a:r>
               <a:rPr lang="en-US" sz="1200" dirty="0">
                 <a:solidFill>
@@ -10649,163 +10588,8 @@
                 <a:ea typeface="Noto Sans SC" pitchFamily="34" charset="-122"/>
                 <a:cs typeface="Noto Sans SC" pitchFamily="34" charset="-120"/>
               </a:rPr>
-              <a:t>I can write a </a:t>
-            </a:r>
-            <a:pPr algn="l" indent="0" marL="0">
-              <a:lnSpc>
-                <a:spcPts val="1680"/>
-              </a:lnSpc>
-              <a:buNone/>
-            </a:pPr>
-            <a:r>
-              <a:rPr lang="en-US" sz="1200" b="1" dirty="0">
-                <a:solidFill>
-                  <a:srgbClr val="1E2A38"/>
-                </a:solidFill>
-                <a:latin typeface="Noto Sans SC" pitchFamily="34" charset="0"/>
-                <a:ea typeface="Noto Sans SC" pitchFamily="34" charset="-122"/>
-                <a:cs typeface="Noto Sans SC" pitchFamily="34" charset="-120"/>
-              </a:rPr>
-              <a:t>full verb + duration + object</a:t>
-            </a:r>
-            <a:pPr algn="l" indent="0" marL="0">
-              <a:lnSpc>
-                <a:spcPts val="1680"/>
-              </a:lnSpc>
-              <a:buNone/>
-            </a:pPr>
-            <a:r>
-              <a:rPr lang="en-US" sz="1200" dirty="0">
-                <a:solidFill>
-                  <a:srgbClr val="5B6677"/>
-                </a:solidFill>
-                <a:latin typeface="Noto Sans SC" pitchFamily="34" charset="0"/>
-                <a:ea typeface="Noto Sans SC" pitchFamily="34" charset="-122"/>
-                <a:cs typeface="Noto Sans SC" pitchFamily="34" charset="-120"/>
-              </a:rPr>
-              <a:t> sentence for any sport learned so far</a:t>
-            </a:r>
-            <a:endParaRPr lang="en-US" sz="1200" dirty="0"/>
-          </a:p>
-        </p:txBody>
-      </p:sp>
-      <p:sp>
-        <p:nvSpPr>
-          <p:cNvPr id="15" name="Text 13"/>
-          <p:cNvSpPr/>
-          <p:nvPr/>
-        </p:nvSpPr>
-        <p:spPr>
-          <a:xfrm>
-            <a:off x="431750" y="2616101"/>
-            <a:ext cx="207213" cy="200025"/>
-          </a:xfrm>
-          <a:prstGeom prst="rect">
-            <a:avLst/>
-          </a:prstGeom>
-          <a:noFill/>
-          <a:ln/>
-        </p:spPr>
-        <p:txBody>
-          <a:bodyPr wrap="square" lIns="0" tIns="0" rIns="0" bIns="0" rtlCol="0" anchor="t"/>
-          <a:lstStyle/>
-          <a:p>
-            <a:pPr algn="l" indent="0" marL="0">
-              <a:buNone/>
-            </a:pPr>
-            <a:r>
-              <a:rPr lang="en-US" sz="1100" b="1" dirty="0">
-                <a:solidFill>
-                  <a:srgbClr val="C8943E"/>
-                </a:solidFill>
-                <a:latin typeface="Noto Sans SC" pitchFamily="34" charset="0"/>
-                <a:ea typeface="Noto Sans SC" pitchFamily="34" charset="-122"/>
-                <a:cs typeface="Noto Sans SC" pitchFamily="34" charset="-120"/>
-              </a:rPr>
-              <a:t>3</a:t>
-            </a:r>
-            <a:endParaRPr lang="en-US" sz="1100" dirty="0"/>
-          </a:p>
-        </p:txBody>
-      </p:sp>
-      <p:sp>
-        <p:nvSpPr>
-          <p:cNvPr id="16" name="Text 14"/>
-          <p:cNvSpPr/>
-          <p:nvPr/>
-        </p:nvSpPr>
-        <p:spPr>
-          <a:xfrm>
-            <a:off x="761851" y="2616101"/>
-            <a:ext cx="5079992" cy="213271"/>
-          </a:xfrm>
-          <a:prstGeom prst="rect">
-            <a:avLst/>
-          </a:prstGeom>
-          <a:noFill/>
-          <a:ln/>
-        </p:spPr>
-        <p:txBody>
-          <a:bodyPr wrap="square" lIns="0" tIns="0" rIns="0" bIns="0" rtlCol="0" anchor="t"/>
-          <a:lstStyle/>
-          <a:p>
-            <a:pPr algn="l" indent="0" marL="0">
-              <a:lnSpc>
-                <a:spcPts val="1680"/>
-              </a:lnSpc>
-              <a:buNone/>
-            </a:pPr>
-            <a:r>
-              <a:rPr lang="en-US" sz="1200" dirty="0">
-                <a:solidFill>
-                  <a:srgbClr val="5B6677"/>
-                </a:solidFill>
-                <a:latin typeface="Noto Sans SC" pitchFamily="34" charset="0"/>
-                <a:ea typeface="Noto Sans SC" pitchFamily="34" charset="-122"/>
-                <a:cs typeface="Noto Sans SC" pitchFamily="34" charset="-120"/>
-              </a:rPr>
-              <a:t>I can describe what someone is doing using </a:t>
-            </a:r>
-            <a:pPr algn="l" indent="0" marL="0">
-              <a:lnSpc>
-                <a:spcPts val="1680"/>
-              </a:lnSpc>
-              <a:buNone/>
-            </a:pPr>
-            <a:r>
-              <a:rPr lang="en-US" sz="1200" b="1" dirty="0">
-                <a:solidFill>
-                  <a:srgbClr val="C8943E"/>
-                </a:solidFill>
-                <a:latin typeface="Noto Sans SC" pitchFamily="34" charset="0"/>
-                <a:ea typeface="Noto Sans SC" pitchFamily="34" charset="-122"/>
-                <a:cs typeface="Noto Sans SC" pitchFamily="34" charset="-120"/>
-              </a:rPr>
-              <a:t>正在</a:t>
-            </a:r>
-            <a:pPr algn="l" indent="0" marL="0">
-              <a:lnSpc>
-                <a:spcPts val="1680"/>
-              </a:lnSpc>
-              <a:buNone/>
-            </a:pPr>
-            <a:r>
-              <a:rPr lang="en-US" sz="1200" dirty="0">
-                <a:solidFill>
-                  <a:srgbClr val="5B6677"/>
-                </a:solidFill>
-                <a:latin typeface="Noto Sans SC" pitchFamily="34" charset="0"/>
-                <a:ea typeface="Noto Sans SC" pitchFamily="34" charset="-122"/>
-                <a:cs typeface="Noto Sans SC" pitchFamily="34" charset="-120"/>
-              </a:rPr>
               <a:t> </a:t>
             </a:r>
-            <a:pPr algn="l" indent="0" marL="0">
-              <a:lnSpc>
-                <a:spcPts val="1680"/>
-              </a:lnSpc>
-              <a:buNone/>
-            </a:pPr>
             <a:r>
               <a:rPr lang="en-US" sz="1200" i="1" dirty="0">
                 <a:solidFill>
@@ -10817,12 +10601,6 @@
               </a:rPr>
               <a:t>(zhèngzài)</a:t>
             </a:r>
-            <a:pPr algn="l" indent="0" marL="0">
-              <a:lnSpc>
-                <a:spcPts val="1680"/>
-              </a:lnSpc>
-              <a:buNone/>
-            </a:pPr>
             <a:r>
               <a:rPr lang="en-US" sz="1200" dirty="0">
                 <a:solidFill>
@@ -10948,9 +10726,6 @@
               </a:rPr>
               <a:t>Cold call: </a:t>
             </a:r>
-            <a:pPr algn="l" indent="0" marL="0">
-              <a:buNone/>
-            </a:pPr>
             <a:r>
               <a:rPr lang="en-US" sz="1200" b="1" dirty="0">
                 <a:solidFill>
@@ -11174,9 +10949,6 @@
               </a:rPr>
               <a:t>L4 · DURATION Q&amp;A + 正在</a:t>
             </a:r>
-            <a:pPr algn="l" indent="0" marL="0">
-              <a:buNone/>
-            </a:pPr>
             <a:r>
               <a:rPr lang="en-US" sz="900" b="1" dirty="0">
                 <a:solidFill>
@@ -11188,9 +10960,6 @@
               </a:rPr>
               <a:t> |</a:t>
             </a:r>
-            <a:pPr algn="l" indent="0" marL="0">
-              <a:buNone/>
-            </a:pPr>
             <a:r>
               <a:rPr lang="en-US" sz="900" dirty="0">
                 <a:solidFill>
@@ -11354,9 +11123,6 @@
               </a:rPr>
               <a:t>几个小时</a:t>
             </a:r>
-            <a:pPr algn="l" indent="0" marL="0">
-              <a:buNone/>
-            </a:pPr>
             <a:r>
               <a:rPr lang="en-US" sz="1500" dirty="0">
                 <a:solidFill>
@@ -11368,9 +11134,6 @@
               </a:rPr>
               <a:t> </a:t>
             </a:r>
-            <a:pPr algn="l" indent="0" marL="0">
-              <a:buNone/>
-            </a:pPr>
             <a:r>
               <a:rPr lang="en-US" sz="1500" dirty="0">
                 <a:solidFill>
@@ -11382,9 +11145,6 @@
               </a:rPr>
               <a:t>jǐ ge xiǎoshí</a:t>
             </a:r>
-            <a:pPr algn="l" indent="0" marL="0">
-              <a:buNone/>
-            </a:pPr>
             <a:r>
               <a:rPr lang="en-US" sz="1500" dirty="0">
                 <a:solidFill>
@@ -11396,9 +11156,6 @@
               </a:rPr>
               <a:t> </a:t>
             </a:r>
-            <a:pPr algn="l" indent="0" marL="0">
-              <a:buNone/>
-            </a:pPr>
             <a:r>
               <a:rPr lang="en-US" sz="1500" dirty="0">
                 <a:solidFill>
@@ -11986,9 +11743,6 @@
               </a:rPr>
               <a:t>几 </a:t>
             </a:r>
-            <a:pPr algn="l" indent="0" marL="0">
-              <a:buNone/>
-            </a:pPr>
             <a:r>
               <a:rPr lang="en-US" sz="1200" dirty="0">
                 <a:solidFill>
@@ -12000,9 +11754,6 @@
               </a:rPr>
               <a:t>(how many)</a:t>
             </a:r>
-            <a:pPr algn="l" indent="0" marL="0">
-              <a:buNone/>
-            </a:pPr>
             <a:r>
               <a:rPr lang="en-US" sz="1200" dirty="0">
                 <a:solidFill>
@@ -12226,9 +11977,6 @@
               </a:rPr>
               <a:t>L4 · DURATION Q&amp;A + 正在</a:t>
             </a:r>
-            <a:pPr algn="l" indent="0" marL="0">
-              <a:buNone/>
-            </a:pPr>
             <a:r>
               <a:rPr lang="en-US" sz="900" b="1" dirty="0">
                 <a:solidFill>
@@ -12240,9 +11988,6 @@
               </a:rPr>
               <a:t> |</a:t>
             </a:r>
-            <a:pPr algn="l" indent="0" marL="0">
-              <a:buNone/>
-            </a:pPr>
             <a:r>
               <a:rPr lang="en-US" sz="900" dirty="0">
                 <a:solidFill>
@@ -12481,9 +12226,6 @@
               </a:rPr>
               <a:t>Q</a:t>
             </a:r>
-            <a:pPr algn="l" indent="0" marL="0">
-              <a:buNone/>
-            </a:pPr>
             <a:r>
               <a:rPr lang="en-US" sz="1200" dirty="0">
                 <a:solidFill>
@@ -12566,9 +12308,6 @@
               </a:rPr>
               <a:t>A</a:t>
             </a:r>
-            <a:pPr algn="l" indent="0" marL="0">
-              <a:buNone/>
-            </a:pPr>
             <a:r>
               <a:rPr lang="en-US" sz="1200" dirty="0">
                 <a:solidFill>
@@ -12655,9 +12394,6 @@
               </a:rPr>
               <a:t>你每天</a:t>
             </a:r>
-            <a:pPr algn="l" indent="0" marL="0">
-              <a:buNone/>
-            </a:pPr>
             <a:r>
               <a:rPr lang="en-US" sz="1200" b="1" dirty="0">
                 <a:solidFill>
@@ -12669,9 +12405,6 @@
               </a:rPr>
               <a:t>跑</a:t>
             </a:r>
-            <a:pPr algn="l" indent="0" marL="0">
-              <a:buNone/>
-            </a:pPr>
             <a:r>
               <a:rPr lang="en-US" sz="1200" dirty="0">
                 <a:solidFill>
@@ -12683,9 +12416,6 @@
               </a:rPr>
               <a:t>几个小时步？我每天</a:t>
             </a:r>
-            <a:pPr algn="l" indent="0" marL="0">
-              <a:buNone/>
-            </a:pPr>
             <a:r>
               <a:rPr lang="en-US" sz="1200" b="1" dirty="0">
                 <a:solidFill>
@@ -12697,9 +12427,6 @@
               </a:rPr>
               <a:t>跑</a:t>
             </a:r>
-            <a:pPr algn="l" indent="0" marL="0">
-              <a:buNone/>
-            </a:pPr>
             <a:r>
               <a:rPr lang="en-US" sz="1200" dirty="0">
                 <a:solidFill>
@@ -12828,9 +12555,6 @@
               </a:rPr>
               <a:t>你每个星期</a:t>
             </a:r>
-            <a:pPr algn="l" indent="0" marL="0">
-              <a:buNone/>
-            </a:pPr>
             <a:r>
               <a:rPr lang="en-US" sz="1200" b="1" dirty="0">
                 <a:solidFill>
@@ -12842,9 +12566,6 @@
               </a:rPr>
               <a:t>打</a:t>
             </a:r>
-            <a:pPr algn="l" indent="0" marL="0">
-              <a:buNone/>
-            </a:pPr>
             <a:r>
               <a:rPr lang="en-US" sz="1200" dirty="0">
                 <a:solidFill>
@@ -12856,9 +12577,6 @@
               </a:rPr>
               <a:t>几个小时网球？我每个星期</a:t>
             </a:r>
-            <a:pPr algn="l" indent="0" marL="0">
-              <a:buNone/>
-            </a:pPr>
             <a:r>
               <a:rPr lang="en-US" sz="1200" b="1" dirty="0">
                 <a:solidFill>
@@ -12870,9 +12588,6 @@
               </a:rPr>
               <a:t>打</a:t>
             </a:r>
-            <a:pPr algn="l" indent="0" marL="0">
-              <a:buNone/>
-            </a:pPr>
             <a:r>
               <a:rPr lang="en-US" sz="1200" dirty="0">
                 <a:solidFill>
@@ -13072,9 +12787,6 @@
               </a:rPr>
               <a:t>Subject + </a:t>
             </a:r>
-            <a:pPr algn="l" indent="0" marL="0">
-              <a:buNone/>
-            </a:pPr>
             <a:r>
               <a:rPr lang="en-US" sz="1200" b="1" dirty="0">
                 <a:solidFill>
@@ -13086,9 +12798,6 @@
               </a:rPr>
               <a:t>正在</a:t>
             </a:r>
-            <a:pPr algn="l" indent="0" marL="0">
-              <a:buNone/>
-            </a:pPr>
             <a:r>
               <a:rPr lang="en-US" sz="1200" dirty="0">
                 <a:solidFill>
@@ -13100,9 +12809,6 @@
               </a:rPr>
               <a:t> + Verb (+ Object) </a:t>
             </a:r>
-            <a:pPr algn="l" indent="0" marL="0">
-              <a:buNone/>
-            </a:pPr>
             <a:r>
               <a:rPr lang="en-US" sz="900" i="1" dirty="0">
                 <a:solidFill>
@@ -13189,9 +12895,6 @@
               </a:rPr>
               <a:t>他</a:t>
             </a:r>
-            <a:pPr algn="l" indent="0" marL="0">
-              <a:buNone/>
-            </a:pPr>
             <a:r>
               <a:rPr lang="en-US" sz="1300" b="1" dirty="0">
                 <a:solidFill>
@@ -13203,9 +12906,6 @@
               </a:rPr>
               <a:t>正在</a:t>
             </a:r>
-            <a:pPr algn="l" indent="0" marL="0">
-              <a:buNone/>
-            </a:pPr>
             <a:r>
               <a:rPr lang="en-US" sz="1300" dirty="0">
                 <a:solidFill>
@@ -13334,9 +13034,6 @@
               </a:rPr>
               <a:t>她</a:t>
             </a:r>
-            <a:pPr algn="l" indent="0" marL="0">
-              <a:buNone/>
-            </a:pPr>
             <a:r>
               <a:rPr lang="en-US" sz="1300" b="1" dirty="0">
                 <a:solidFill>
@@ -13348,9 +13045,6 @@
               </a:rPr>
               <a:t>正在</a:t>
             </a:r>
-            <a:pPr algn="l" indent="0" marL="0">
-              <a:buNone/>
-            </a:pPr>
             <a:r>
               <a:rPr lang="en-US" sz="1300" dirty="0">
                 <a:solidFill>
@@ -13479,9 +13173,6 @@
               </a:rPr>
               <a:t>你</a:t>
             </a:r>
-            <a:pPr algn="l" indent="0" marL="0">
-              <a:buNone/>
-            </a:pPr>
             <a:r>
               <a:rPr lang="en-US" sz="1200" b="1" dirty="0">
                 <a:solidFill>
@@ -13493,9 +13184,6 @@
               </a:rPr>
               <a:t>正在</a:t>
             </a:r>
-            <a:pPr algn="l" indent="0" marL="0">
-              <a:buNone/>
-            </a:pPr>
             <a:r>
               <a:rPr lang="en-US" sz="1200" dirty="0">
                 <a:solidFill>
@@ -13507,9 +13195,6 @@
               </a:rPr>
               <a:t>打乒乓球吗？不，我</a:t>
             </a:r>
-            <a:pPr algn="l" indent="0" marL="0">
-              <a:buNone/>
-            </a:pPr>
             <a:r>
               <a:rPr lang="en-US" sz="1200" b="1" dirty="0">
                 <a:solidFill>
@@ -13521,9 +13206,6 @@
               </a:rPr>
               <a:t>正在</a:t>
             </a:r>
-            <a:pPr algn="l" indent="0" marL="0">
-              <a:buNone/>
-            </a:pPr>
             <a:r>
               <a:rPr lang="en-US" sz="1200" dirty="0">
                 <a:solidFill>
@@ -13577,12 +13259,6 @@
               </a:rPr>
               <a:t>Are you playing ping-pong right now? No, I'm doing homework! </a:t>
             </a:r>
-            <a:pPr algn="l" indent="0" marL="0">
-              <a:spcBef>
-                <a:spcPts val="200"/>
-              </a:spcBef>
-              <a:buNone/>
-            </a:pPr>
             <a:r>
               <a:rPr lang="en-US" sz="800" b="1" dirty="0">
                 <a:solidFill>
@@ -13764,9 +13440,6 @@
               </a:rPr>
               <a:t>L4 · DURATION Q&amp;A + 正在</a:t>
             </a:r>
-            <a:pPr algn="l" indent="0" marL="0">
-              <a:buNone/>
-            </a:pPr>
             <a:r>
               <a:rPr lang="en-US" sz="900" b="1" dirty="0">
                 <a:solidFill>
@@ -13778,9 +13451,6 @@
               </a:rPr>
               <a:t> |</a:t>
             </a:r>
-            <a:pPr algn="l" indent="0" marL="0">
-              <a:buNone/>
-            </a:pPr>
             <a:r>
               <a:rPr lang="en-US" sz="900" dirty="0">
                 <a:solidFill>
@@ -13915,12 +13585,6 @@
               </a:rPr>
               <a:t>Write your answer on your mini whiteboard </a:t>
             </a:r>
-            <a:pPr algn="l" indent="0" marL="0">
-              <a:spcBef>
-                <a:spcPts val="400"/>
-              </a:spcBef>
-              <a:buNone/>
-            </a:pPr>
             <a:r>
               <a:rPr lang="en-US" sz="800" b="1" dirty="0">
                 <a:solidFill>
@@ -14272,12 +13936,6 @@
               </a:rPr>
               <a:t>Error correction: </a:t>
             </a:r>
-            <a:pPr algn="l" indent="0" marL="0">
-              <a:lnSpc>
-                <a:spcPts val="1560"/>
-              </a:lnSpc>
-              <a:buNone/>
-            </a:pPr>
             <a:r>
               <a:rPr lang="en-US" sz="1200" b="1" dirty="0">
                 <a:solidFill>
@@ -14289,12 +13947,6 @@
               </a:rPr>
               <a:t>你每天几个小时打网球？</a:t>
             </a:r>
-            <a:pPr algn="l" indent="0" marL="0">
-              <a:lnSpc>
-                <a:spcPts val="1560"/>
-              </a:lnSpc>
-              <a:buNone/>
-            </a:pPr>
             <a:r>
               <a:rPr lang="en-US" sz="1200" dirty="0">
                 <a:solidFill>
@@ -14497,12 +14149,6 @@
               </a:rPr>
               <a:t>Make a sentence with </a:t>
             </a:r>
-            <a:pPr algn="l" indent="0" marL="0">
-              <a:lnSpc>
-                <a:spcPts val="1560"/>
-              </a:lnSpc>
-              <a:buNone/>
-            </a:pPr>
             <a:r>
               <a:rPr lang="en-US" sz="1200" b="1" dirty="0">
                 <a:solidFill>
@@ -14514,12 +14160,6 @@
               </a:rPr>
               <a:t>正在</a:t>
             </a:r>
-            <a:pPr algn="l" indent="0" marL="0">
-              <a:lnSpc>
-                <a:spcPts val="1560"/>
-              </a:lnSpc>
-              <a:buNone/>
-            </a:pPr>
             <a:r>
               <a:rPr lang="en-US" sz="1200" dirty="0">
                 <a:solidFill>
@@ -14743,9 +14383,6 @@
               </a:rPr>
               <a:t>L4 · DURATION Q&amp;A + 正在</a:t>
             </a:r>
-            <a:pPr algn="l" indent="0" marL="0">
-              <a:buNone/>
-            </a:pPr>
             <a:r>
               <a:rPr lang="en-US" sz="900" b="1" dirty="0">
                 <a:solidFill>
@@ -14757,9 +14394,6 @@
               </a:rPr>
               <a:t> |</a:t>
             </a:r>
-            <a:pPr algn="l" indent="0" marL="0">
-              <a:buNone/>
-            </a:pPr>
             <a:r>
               <a:rPr lang="en-US" sz="900" dirty="0">
                 <a:solidFill>
@@ -15712,9 +15346,6 @@
               </a:rPr>
               <a:t>L4 · DURATION Q&amp;A + 正在</a:t>
             </a:r>
-            <a:pPr algn="l" indent="0" marL="0">
-              <a:buNone/>
-            </a:pPr>
             <a:r>
               <a:rPr lang="en-US" sz="900" b="1" dirty="0">
                 <a:solidFill>
@@ -15726,9 +15357,6 @@
               </a:rPr>
               <a:t> |</a:t>
             </a:r>
-            <a:pPr algn="l" indent="0" marL="0">
-              <a:buNone/>
-            </a:pPr>
             <a:r>
               <a:rPr lang="en-US" sz="900" dirty="0">
                 <a:solidFill>
@@ -16117,12 +15745,6 @@
               </a:rPr>
               <a:t>1. Teacher gives a sport + duration prompt — e.g. </a:t>
             </a:r>
-            <a:pPr algn="l" indent="0" marL="0">
-              <a:lnSpc>
-                <a:spcPts val="1418"/>
-              </a:lnSpc>
-              <a:buNone/>
-            </a:pPr>
             <a:r>
               <a:rPr lang="en-US" sz="1050" b="1" dirty="0">
                 <a:solidFill>
@@ -16155,12 +15777,6 @@
               </a:rPr>
               <a:t>2. Students write the </a:t>
             </a:r>
-            <a:pPr algn="l" indent="0" marL="0">
-              <a:lnSpc>
-                <a:spcPts val="1418"/>
-              </a:lnSpc>
-              <a:buNone/>
-            </a:pPr>
             <a:r>
               <a:rPr lang="en-US" sz="1050" b="1" dirty="0">
                 <a:solidFill>
@@ -16172,12 +15788,6 @@
               </a:rPr>
               <a:t>full question-and-answer pair</a:t>
             </a:r>
-            <a:pPr algn="l" indent="0" marL="0">
-              <a:lnSpc>
-                <a:spcPts val="1418"/>
-              </a:lnSpc>
-              <a:buNone/>
-            </a:pPr>
             <a:r>
               <a:rPr lang="en-US" sz="1050" dirty="0">
                 <a:solidFill>
@@ -16210,12 +15820,6 @@
               </a:rPr>
               <a:t>3. Repeat with </a:t>
             </a:r>
-            <a:pPr algn="l" indent="0" marL="0">
-              <a:lnSpc>
-                <a:spcPts val="1418"/>
-              </a:lnSpc>
-              <a:buNone/>
-            </a:pPr>
             <a:r>
               <a:rPr lang="en-US" sz="1050" b="1" dirty="0">
                 <a:solidFill>
@@ -16227,12 +15831,6 @@
               </a:rPr>
               <a:t>3 more prompts</a:t>
             </a:r>
-            <a:pPr algn="l" indent="0" marL="0">
-              <a:lnSpc>
-                <a:spcPts val="1418"/>
-              </a:lnSpc>
-              <a:buNone/>
-            </a:pPr>
             <a:r>
               <a:rPr lang="en-US" sz="1050" dirty="0">
                 <a:solidFill>
@@ -16402,6 +16000,31 @@
               </a:rPr>
               <a:t>你每天/每个星期</a:t>
             </a:r>
+            <a:r>
+              <a:rPr lang="en-US" sz="1300" dirty="0">
+                <a:solidFill>
+                  <a:srgbClr val="1E2A38"/>
+                </a:solidFill>
+                <a:latin typeface="Noto Serif SC" pitchFamily="34" charset="0"/>
+                <a:ea typeface="Noto Serif SC" pitchFamily="34" charset="-122"/>
+                <a:cs typeface="Noto Serif SC" pitchFamily="34" charset="-120"/>
+              </a:rPr>
+              <a:t>几个小时</a:t>
+            </a:r>
+            <a:r>
+              <a:rPr lang="en-US" sz="1300" dirty="0">
+                <a:solidFill>
+                  <a:srgbClr val="1E2A38"/>
+                </a:solidFill>
+                <a:latin typeface="Noto Serif SC" pitchFamily="34" charset="0"/>
+                <a:ea typeface="Noto Serif SC" pitchFamily="34" charset="-122"/>
+                <a:cs typeface="Noto Serif SC" pitchFamily="34" charset="-120"/>
+              </a:rPr>
+              <a:t>？</a:t>
+            </a:r>
+            <a:endParaRPr lang="en-US" sz="1300" dirty="0"/>
+          </a:p>
+          <a:p>
             <a:pPr algn="l" indent="0" marL="0">
               <a:lnSpc>
                 <a:spcPts val="2080"/>
@@ -16417,8 +16040,11 @@
                 <a:ea typeface="Noto Serif SC" pitchFamily="34" charset="-122"/>
                 <a:cs typeface="Noto Serif SC" pitchFamily="34" charset="-120"/>
               </a:rPr>
-              <a:t>几个小时</a:t>
-            </a:r>
+              <a:t>我每天/每个星期</a:t>
+            </a:r>
+            <a:endParaRPr lang="en-US" sz="1300" dirty="0"/>
+          </a:p>
+          <a:p>
             <a:pPr algn="l" indent="0" marL="0">
               <a:lnSpc>
                 <a:spcPts val="2080"/>
@@ -16434,54 +16060,8 @@
                 <a:ea typeface="Noto Serif SC" pitchFamily="34" charset="-122"/>
                 <a:cs typeface="Noto Serif SC" pitchFamily="34" charset="-120"/>
               </a:rPr>
-              <a:t>？</a:t>
-            </a:r>
-            <a:endParaRPr lang="en-US" sz="1300" dirty="0"/>
-          </a:p>
-          <a:p>
-            <a:pPr algn="l" indent="0" marL="0">
-              <a:lnSpc>
-                <a:spcPts val="2080"/>
-              </a:lnSpc>
-              <a:buNone/>
-            </a:pPr>
-            <a:r>
-              <a:rPr lang="en-US" sz="1300" dirty="0">
-                <a:solidFill>
-                  <a:srgbClr val="1E2A38"/>
-                </a:solidFill>
-                <a:latin typeface="Noto Serif SC" pitchFamily="34" charset="0"/>
-                <a:ea typeface="Noto Serif SC" pitchFamily="34" charset="-122"/>
-                <a:cs typeface="Noto Serif SC" pitchFamily="34" charset="-120"/>
-              </a:rPr>
-              <a:t>我每天/每个星期</a:t>
-            </a:r>
-            <a:endParaRPr lang="en-US" sz="1300" dirty="0"/>
-          </a:p>
-          <a:p>
-            <a:pPr algn="l" indent="0" marL="0">
-              <a:lnSpc>
-                <a:spcPts val="2080"/>
-              </a:lnSpc>
-              <a:buNone/>
-            </a:pPr>
-            <a:r>
-              <a:rPr lang="en-US" sz="1300" dirty="0">
-                <a:solidFill>
-                  <a:srgbClr val="1E2A38"/>
-                </a:solidFill>
-                <a:latin typeface="Noto Serif SC" pitchFamily="34" charset="0"/>
-                <a:ea typeface="Noto Serif SC" pitchFamily="34" charset="-122"/>
-                <a:cs typeface="Noto Serif SC" pitchFamily="34" charset="-120"/>
-              </a:rPr>
               <a:t>[duration]</a:t>
             </a:r>
-            <a:pPr algn="l" indent="0" marL="0">
-              <a:lnSpc>
-                <a:spcPts val="2080"/>
-              </a:lnSpc>
-              <a:buNone/>
-            </a:pPr>
             <a:r>
               <a:rPr lang="en-US" sz="1300" dirty="0">
                 <a:solidFill>
@@ -16613,12 +16193,6 @@
               </a:rPr>
               <a:t>网球 </a:t>
             </a:r>
-            <a:pPr algn="l" indent="0" marL="0">
-              <a:spcAft>
-                <a:spcPts val="400"/>
-              </a:spcAft>
-              <a:buNone/>
-            </a:pPr>
             <a:r>
               <a:rPr lang="en-US" sz="1200" b="1" dirty="0">
                 <a:solidFill>
@@ -16630,12 +16204,6 @@
               </a:rPr>
               <a:t>/</a:t>
             </a:r>
-            <a:pPr algn="l" indent="0" marL="0">
-              <a:spcAft>
-                <a:spcPts val="400"/>
-              </a:spcAft>
-              <a:buNone/>
-            </a:pPr>
             <a:r>
               <a:rPr lang="en-US" sz="1200" dirty="0">
                 <a:solidFill>
@@ -17198,9 +16766,6 @@
               </a:rPr>
               <a:t>L4 · DURATION Q&amp;A + 正在</a:t>
             </a:r>
-            <a:pPr algn="l" indent="0" marL="0">
-              <a:buNone/>
-            </a:pPr>
             <a:r>
               <a:rPr lang="en-US" sz="900" b="1" dirty="0">
                 <a:solidFill>
@@ -17212,9 +16777,6 @@
               </a:rPr>
               <a:t> |</a:t>
             </a:r>
-            <a:pPr algn="l" indent="0" marL="0">
-              <a:buNone/>
-            </a:pPr>
             <a:r>
               <a:rPr lang="en-US" sz="900" dirty="0">
                 <a:solidFill>
@@ -17603,12 +17165,6 @@
               </a:rPr>
               <a:t>1. Teacher shows each people-doing-sport picture one at a time — </a:t>
             </a:r>
-            <a:pPr algn="l" indent="0" marL="0">
-              <a:lnSpc>
-                <a:spcPts val="1418"/>
-              </a:lnSpc>
-              <a:buNone/>
-            </a:pPr>
             <a:r>
               <a:rPr lang="en-US" sz="1050" b="1" dirty="0">
                 <a:solidFill>
@@ -17620,12 +17176,6 @@
               </a:rPr>
               <a:t>Act.1 (p.71)</a:t>
             </a:r>
-            <a:pPr algn="l" indent="0" marL="0">
-              <a:lnSpc>
-                <a:spcPts val="1418"/>
-              </a:lnSpc>
-              <a:buNone/>
-            </a:pPr>
             <a:r>
               <a:rPr lang="en-US" sz="1050" dirty="0">
                 <a:solidFill>
@@ -17637,12 +17187,6 @@
               </a:rPr>
               <a:t> + </a:t>
             </a:r>
-            <a:pPr algn="l" indent="0" marL="0">
-              <a:lnSpc>
-                <a:spcPts val="1418"/>
-              </a:lnSpc>
-              <a:buNone/>
-            </a:pPr>
             <a:r>
               <a:rPr lang="en-US" sz="1050" b="1" dirty="0">
                 <a:solidFill>
@@ -17654,12 +17198,6 @@
               </a:rPr>
               <a:t>Act.10 (p.76)</a:t>
             </a:r>
-            <a:pPr algn="l" indent="0" marL="0">
-              <a:lnSpc>
-                <a:spcPts val="1418"/>
-              </a:lnSpc>
-              <a:buNone/>
-            </a:pPr>
             <a:r>
               <a:rPr lang="en-US" sz="1050" dirty="0">
                 <a:solidFill>
@@ -17692,12 +17230,6 @@
               </a:rPr>
               <a:t>2. Students first </a:t>
             </a:r>
-            <a:pPr algn="l" indent="0" marL="0">
-              <a:lnSpc>
-                <a:spcPts val="1418"/>
-              </a:lnSpc>
-              <a:buNone/>
-            </a:pPr>
             <a:r>
               <a:rPr lang="en-US" sz="1050" b="1" dirty="0">
                 <a:solidFill>
@@ -17709,12 +17241,6 @@
               </a:rPr>
               <a:t>write a 正在 sentence</a:t>
             </a:r>
-            <a:pPr algn="l" indent="0" marL="0">
-              <a:lnSpc>
-                <a:spcPts val="1418"/>
-              </a:lnSpc>
-              <a:buNone/>
-            </a:pPr>
             <a:r>
               <a:rPr lang="en-US" sz="1050" dirty="0">
                 <a:solidFill>
@@ -17747,12 +17273,6 @@
               </a:rPr>
               <a:t>3. Once every picture has been written, teacher </a:t>
             </a:r>
-            <a:pPr algn="l" indent="0" marL="0">
-              <a:lnSpc>
-                <a:spcPts val="1418"/>
-              </a:lnSpc>
-              <a:buNone/>
-            </a:pPr>
             <a:r>
               <a:rPr lang="en-US" sz="1050" b="1" dirty="0">
                 <a:solidFill>
@@ -17785,12 +17305,6 @@
               </a:rPr>
               <a:t>4. Students </a:t>
             </a:r>
-            <a:pPr algn="l" indent="0" marL="0">
-              <a:lnSpc>
-                <a:spcPts val="1418"/>
-              </a:lnSpc>
-              <a:buNone/>
-            </a:pPr>
             <a:r>
               <a:rPr lang="en-US" sz="1050" b="1" dirty="0">
                 <a:solidFill>
@@ -17802,12 +17316,6 @@
               </a:rPr>
               <a:t>act out (TPR)</a:t>
             </a:r>
-            <a:pPr algn="l" indent="0" marL="0">
-              <a:lnSpc>
-                <a:spcPts val="1418"/>
-              </a:lnSpc>
-              <a:buNone/>
-            </a:pPr>
             <a:r>
               <a:rPr lang="en-US" sz="1050" dirty="0">
                 <a:solidFill>
@@ -17932,9 +17440,6 @@
               </a:rPr>
               <a:t>游泳 </a:t>
             </a:r>
-            <a:pPr algn="l" indent="0" marL="0">
-              <a:buNone/>
-            </a:pPr>
             <a:r>
               <a:rPr lang="en-US" sz="900" b="1" dirty="0">
                 <a:solidFill>
@@ -17946,9 +17451,6 @@
               </a:rPr>
               <a:t>yóuyǒng</a:t>
             </a:r>
-            <a:pPr algn="l" indent="0" marL="0">
-              <a:buNone/>
-            </a:pPr>
             <a:r>
               <a:rPr lang="en-US" sz="1300" b="1" dirty="0">
                 <a:solidFill>
@@ -17960,9 +17462,6 @@
               </a:rPr>
               <a:t> </a:t>
             </a:r>
-            <a:pPr algn="l" indent="0" marL="0">
-              <a:buNone/>
-            </a:pPr>
             <a:r>
               <a:rPr lang="en-US" sz="900" b="1" dirty="0">
                 <a:solidFill>
@@ -17991,9 +17490,6 @@
               </a:rPr>
               <a:t>打网球 </a:t>
             </a:r>
-            <a:pPr algn="l" indent="0" marL="0">
-              <a:buNone/>
-            </a:pPr>
             <a:r>
               <a:rPr lang="en-US" sz="900" b="1" dirty="0">
                 <a:solidFill>
@@ -18005,9 +17501,6 @@
               </a:rPr>
               <a:t>dǎ wǎngqiú</a:t>
             </a:r>
-            <a:pPr algn="l" indent="0" marL="0">
-              <a:buNone/>
-            </a:pPr>
             <a:r>
               <a:rPr lang="en-US" sz="1300" b="1" dirty="0">
                 <a:solidFill>
@@ -18019,9 +17512,6 @@
               </a:rPr>
               <a:t> </a:t>
             </a:r>
-            <a:pPr algn="l" indent="0" marL="0">
-              <a:buNone/>
-            </a:pPr>
             <a:r>
               <a:rPr lang="en-US" sz="900" b="1" dirty="0">
                 <a:solidFill>
@@ -18050,9 +17540,6 @@
               </a:rPr>
               <a:t>打篮球 </a:t>
             </a:r>
-            <a:pPr algn="l" indent="0" marL="0">
-              <a:buNone/>
-            </a:pPr>
             <a:r>
               <a:rPr lang="en-US" sz="900" b="1" dirty="0">
                 <a:solidFill>
@@ -18064,9 +17551,6 @@
               </a:rPr>
               <a:t>dǎ lánqiú</a:t>
             </a:r>
-            <a:pPr algn="l" indent="0" marL="0">
-              <a:buNone/>
-            </a:pPr>
             <a:r>
               <a:rPr lang="en-US" sz="1300" b="1" dirty="0">
                 <a:solidFill>
@@ -18078,9 +17562,6 @@
               </a:rPr>
               <a:t> </a:t>
             </a:r>
-            <a:pPr algn="l" indent="0" marL="0">
-              <a:buNone/>
-            </a:pPr>
             <a:r>
               <a:rPr lang="en-US" sz="900" b="1" dirty="0">
                 <a:solidFill>
@@ -18109,9 +17590,6 @@
               </a:rPr>
               <a:t>打乒乓球 </a:t>
             </a:r>
-            <a:pPr algn="l" indent="0" marL="0">
-              <a:buNone/>
-            </a:pPr>
             <a:r>
               <a:rPr lang="en-US" sz="900" b="1" dirty="0">
                 <a:solidFill>
@@ -18123,9 +17601,6 @@
               </a:rPr>
               <a:t>dǎ pīngpāngqiú</a:t>
             </a:r>
-            <a:pPr algn="l" indent="0" marL="0">
-              <a:buNone/>
-            </a:pPr>
             <a:r>
               <a:rPr lang="en-US" sz="1300" b="1" dirty="0">
                 <a:solidFill>
@@ -18137,9 +17612,6 @@
               </a:rPr>
               <a:t> </a:t>
             </a:r>
-            <a:pPr algn="l" indent="0" marL="0">
-              <a:buNone/>
-            </a:pPr>
             <a:r>
               <a:rPr lang="en-US" sz="900" b="1" dirty="0">
                 <a:solidFill>
@@ -18168,9 +17640,6 @@
               </a:rPr>
               <a:t>跑步 </a:t>
             </a:r>
-            <a:pPr algn="l" indent="0" marL="0">
-              <a:buNone/>
-            </a:pPr>
             <a:r>
               <a:rPr lang="en-US" sz="900" b="1" dirty="0">
                 <a:solidFill>
@@ -18182,9 +17651,6 @@
               </a:rPr>
               <a:t>pǎobù</a:t>
             </a:r>
-            <a:pPr algn="l" indent="0" marL="0">
-              <a:buNone/>
-            </a:pPr>
             <a:r>
               <a:rPr lang="en-US" sz="1300" b="1" dirty="0">
                 <a:solidFill>
@@ -18196,9 +17662,6 @@
               </a:rPr>
               <a:t> </a:t>
             </a:r>
-            <a:pPr algn="l" indent="0" marL="0">
-              <a:buNone/>
-            </a:pPr>
             <a:r>
               <a:rPr lang="en-US" sz="900" b="1" dirty="0">
                 <a:solidFill>
@@ -18327,9 +17790,6 @@
               </a:rPr>
               <a:t>他/她 </a:t>
             </a:r>
-            <a:pPr algn="l" indent="0" marL="0">
-              <a:buNone/>
-            </a:pPr>
             <a:r>
               <a:rPr lang="en-US" sz="1300" b="1" dirty="0">
                 <a:solidFill>
@@ -18341,9 +17801,6 @@
               </a:rPr>
               <a:t>正在</a:t>
             </a:r>
-            <a:pPr algn="l" indent="0" marL="0">
-              <a:buNone/>
-            </a:pPr>
             <a:r>
               <a:rPr lang="en-US" sz="1300" dirty="0">
                 <a:solidFill>
@@ -18394,9 +17851,6 @@
               </a:rPr>
               <a:t>他/她 </a:t>
             </a:r>
-            <a:pPr algn="l" indent="0" marL="0">
-              <a:buNone/>
-            </a:pPr>
             <a:r>
               <a:rPr lang="en-US" sz="1300" b="1" dirty="0">
                 <a:solidFill>
@@ -18408,9 +17862,6 @@
               </a:rPr>
               <a:t>正在</a:t>
             </a:r>
-            <a:pPr algn="l" indent="0" marL="0">
-              <a:buNone/>
-            </a:pPr>
             <a:r>
               <a:rPr lang="en-US" sz="1300" dirty="0">
                 <a:solidFill>
